--- a/test/fixtures/sample.pptx
+++ b/test/fixtures/sample.pptx
@@ -8,6 +8,138 @@
     <p:sldId id="259" r:id="rId4"/>
   </p:sldIdLst>
 </p:presentation>
+</file>
+
+<file path=ppt/diagrams/data1.xml><?xml version="1.0" encoding="utf-8"?>
+<dgm:dataModel xmlns:dgm="http://schemas.openxmlformats.org/drawingml/2006/diagram" xmlns:a="http://schemas.openxmlformats.org/drawingml/2006/main">
+  <dgm:ptLst>
+    <dgm:pt modelId="{D0}" type="doc">
+      <dgm:prSet loTypeId="urn:microsoft.com/office/officeart/2005/8/layout/process1"/>
+    </dgm:pt>
+    <dgm:pt modelId="{N1}">
+      <dgm:prSet/>
+      <dgm:spPr/>
+      <dgm:t>
+        <a:bodyPr/>
+        <a:lstStyle/>
+        <a:p>
+          <a:r>
+            <a:rPr lang="en-GB"/>
+            <a:t>Discover</a:t>
+          </a:r>
+        </a:p>
+      </dgm:t>
+    </dgm:pt>
+    <dgm:pt modelId="{N2}">
+      <dgm:prSet/>
+      <dgm:spPr/>
+      <dgm:t>
+        <a:bodyPr/>
+        <a:lstStyle/>
+        <a:p>
+          <a:r>
+            <a:rPr lang="en-GB"/>
+            <a:t>Design &amp; build</a:t>
+          </a:r>
+        </a:p>
+      </dgm:t>
+    </dgm:pt>
+    <dgm:pt modelId="{N3}">
+      <dgm:prSet/>
+      <dgm:spPr/>
+      <dgm:t>
+        <a:bodyPr/>
+        <a:lstStyle/>
+        <a:p>
+          <a:r>
+            <a:rPr lang="en-GB"/>
+            <a:t>Beta</a:t>
+          </a:r>
+        </a:p>
+      </dgm:t>
+    </dgm:pt>
+    <dgm:pt modelId="{N4}">
+      <dgm:prSet/>
+      <dgm:spPr/>
+      <dgm:t>
+        <a:bodyPr/>
+        <a:lstStyle/>
+        <a:p>
+          <a:r>
+            <a:rPr lang="en-GB"/>
+            <a:t>General availability</a:t>
+          </a:r>
+        </a:p>
+      </dgm:t>
+    </dgm:pt>
+    <dgm:pt modelId="{P1}" type="pres">
+      <dgm:prSet presName="node" presStyleLbl="node1"/>
+      <dgm:t>
+        <a:bodyPr/>
+        <a:p>
+          <a:r>
+            <a:t>PRESENTATION SCAFFOLD</a:t>
+          </a:r>
+        </a:p>
+      </dgm:t>
+    </dgm:pt>
+    <dgm:pt modelId="{P2}" type="pres">
+      <dgm:prSet presName="node" presStyleLbl="node1"/>
+      <dgm:t>
+        <a:bodyPr/>
+        <a:p>
+          <a:r>
+            <a:t>PRESENTATION SCAFFOLD</a:t>
+          </a:r>
+        </a:p>
+      </dgm:t>
+    </dgm:pt>
+    <dgm:pt modelId="{P3}" type="pres">
+      <dgm:prSet presName="node" presStyleLbl="node1"/>
+      <dgm:t>
+        <a:bodyPr/>
+        <a:p>
+          <a:r>
+            <a:t>PRESENTATION SCAFFOLD</a:t>
+          </a:r>
+        </a:p>
+      </dgm:t>
+    </dgm:pt>
+    <dgm:pt modelId="{P4}" type="pres">
+      <dgm:prSet presName="node" presStyleLbl="node1"/>
+      <dgm:t>
+        <a:bodyPr/>
+        <a:p>
+          <a:r>
+            <a:t>PRESENTATION SCAFFOLD</a:t>
+          </a:r>
+        </a:p>
+      </dgm:t>
+    </dgm:pt>
+  </dgm:ptLst>
+  <dgm:cxnLst>
+    <dgm:cxn modelId="{C1}" srcId="{D0}" destId="{N1}" srcOrd="0" destOrd="0" type="parOf"/>
+    <dgm:cxn modelId="{C2}" srcId="{D0}" destId="{N2}" srcOrd="1" destOrd="0" type="parOf"/>
+    <dgm:cxn modelId="{C3}" srcId="{D0}" destId="{N3}" srcOrd="2" destOrd="0" type="parOf"/>
+    <dgm:cxn modelId="{C4}" srcId="{D0}" destId="{N4}" srcOrd="3" destOrd="0" type="parOf"/>
+    <dgm:cxn modelId="{X1}" srcId="{D0}" destId="{P1}" srcOrd="0" destOrd="0" type="presOf"/>
+    <dgm:cxn modelId="{X2}" srcId="{D0}" destId="{P2}" srcOrd="1" destOrd="0" type="presOf"/>
+    <dgm:cxn modelId="{X3}" srcId="{D0}" destId="{P3}" srcOrd="2" destOrd="0" type="presOf"/>
+    <dgm:cxn modelId="{X4}" srcId="{D0}" destId="{P4}" srcOrd="3" destOrd="0" type="presOf"/>
+  </dgm:cxnLst>
+  <dgm:bg/>
+  <dgm:whole/>
+</dgm:dataModel>
+</file>
+
+<file path=ppt/diagrams/layout1.xml><?xml version="1.0" encoding="utf-8"?>
+<dgm:layoutDef xmlns:dgm="http://schemas.openxmlformats.org/drawingml/2006/diagram" uniqueId="urn:microsoft.com/office/officeart/2005/8/layout/process1">
+  <dgm:title val="Basic Process"/>
+  <dgm:desc val=""/>
+  <dgm:catLst>
+    <dgm:cat type="process" pri="1000"/>
+  </dgm:catLst>
+</dgm:layoutDef>
 </file>
 
 <file path=ppt/notesSlides/notesSlide1.xml><?xml version="1.0" encoding="utf-8"?>
@@ -305,7 +437,9 @@
           <p:nvPr/>
         </p:nvGraphicFramePr>
         <a:graphic>
-          <a:graphicData uri="http://schemas.openxmlformats.org/drawingml/2006/diagram"/>
+          <a:graphicData uri="http://schemas.openxmlformats.org/drawingml/2006/diagram">
+            <dgm:relIds xmlns:dgm="http://schemas.openxmlformats.org/drawingml/2006/diagram" xmlns:r="http://schemas.openxmlformats.org/officeDocument/2006/relationships" r:dm="rId3" r:lo="rId4" r:qs="rId5" r:cs="rId6"/>
+          </a:graphicData>
         </a:graphic>
       </p:graphicFrame>
     </p:spTree>

--- a/test/fixtures/sample.pptx
+++ b/test/fixtures/sample.pptx
@@ -6,6 +6,7 @@
     <p:sldId id="257" r:id="rId2"/>
     <p:sldId id="258" r:id="rId3"/>
     <p:sldId id="259" r:id="rId4"/>
+    <p:sldId id="260" r:id="rId5"/>
   </p:sldIdLst>
 </p:presentation>
 </file>
@@ -448,6 +449,168 @@
 </file>
 
 <file path=ppt/slides/slide4.xml><?xml version="1.0" encoding="utf-8"?>
+<p:sld xmlns:p="http://schemas.openxmlformats.org/presentationml/2006/main" xmlns:a="http://schemas.openxmlformats.org/drawingml/2006/main" xmlns:r="http://schemas.openxmlformats.org/officeDocument/2006/relationships">
+  <p:cSld>
+    <p:spTree>
+      <p:nvGrpSpPr>
+        <p:cNvPr id="1" name="root"/>
+        <p:cNvGrpSpPr/>
+        <p:nvPr/>
+      </p:nvGrpSpPr>
+      <p:grpSpPr/>
+      <p:sp>
+        <p:nvSpPr>
+          <p:cNvPr id="2" name="title"/>
+          <p:cNvSpPr/>
+          <p:nvPr>
+            <p:ph type="title"/>
+          </p:nvPr>
+        </p:nvSpPr>
+        <p:spPr/>
+        <p:txBody>
+          <a:bodyPr/>
+          <a:p>
+            <a:pPr>
+              <a:buNone/>
+            </a:pPr>
+            <a:r>
+              <a:rPr lang="en"/>
+              <a:t>How an order flows</a:t>
+            </a:r>
+          </a:p>
+        </p:txBody>
+      </p:sp>
+      <p:sp>
+        <p:nvSpPr>
+          <p:cNvPr id="3" name="Box A"/>
+          <p:cNvSpPr/>
+          <p:nvPr/>
+        </p:nvSpPr>
+        <p:spPr>
+          <a:xfrm>
+            <a:off x="571500" y="2190750"/>
+            <a:ext cx="2095500" cy="914400"/>
+          </a:xfrm>
+          <a:prstGeom prst="roundRect">
+            <a:avLst/>
+          </a:prstGeom>
+        </p:spPr>
+        <p:txBody>
+          <a:bodyPr/>
+          <a:lstStyle/>
+          <a:p>
+            <a:pPr algn="ctr">
+              <a:buNone/>
+            </a:pPr>
+            <a:r>
+              <a:rPr lang="en"/>
+              <a:t>Client</a:t>
+            </a:r>
+          </a:p>
+        </p:txBody>
+      </p:sp>
+      <p:sp>
+        <p:nvSpPr>
+          <p:cNvPr id="4" name="Box B"/>
+          <p:cNvSpPr/>
+          <p:nvPr/>
+        </p:nvSpPr>
+        <p:spPr>
+          <a:xfrm>
+            <a:off x="4000500" y="2190750"/>
+            <a:ext cx="2095500" cy="914400"/>
+          </a:xfrm>
+          <a:prstGeom prst="rect">
+            <a:avLst/>
+          </a:prstGeom>
+        </p:spPr>
+        <p:txBody>
+          <a:bodyPr/>
+          <a:lstStyle/>
+          <a:p>
+            <a:pPr algn="ctr">
+              <a:buNone/>
+            </a:pPr>
+            <a:r>
+              <a:rPr lang="en"/>
+              <a:t>Order service</a:t>
+            </a:r>
+          </a:p>
+        </p:txBody>
+      </p:sp>
+      <p:sp>
+        <p:nvSpPr>
+          <p:cNvPr id="5" name="Box C"/>
+          <p:cNvSpPr/>
+          <p:nvPr/>
+        </p:nvSpPr>
+        <p:spPr>
+          <a:xfrm>
+            <a:off x="7429500" y="2190750"/>
+            <a:ext cx="2095500" cy="914400"/>
+          </a:xfrm>
+          <a:prstGeom prst="ellipse">
+            <a:avLst/>
+          </a:prstGeom>
+        </p:spPr>
+        <p:txBody>
+          <a:bodyPr/>
+          <a:lstStyle/>
+          <a:p>
+            <a:pPr algn="ctr">
+              <a:buNone/>
+            </a:pPr>
+            <a:r>
+              <a:rPr lang="en"/>
+              <a:t>Ledger</a:t>
+            </a:r>
+          </a:p>
+        </p:txBody>
+      </p:sp>
+      <p:cxnSp>
+        <p:nvCxnSpPr>
+          <p:cNvPr id="6" name="Connector 6"/>
+          <p:cNvCxnSpPr>
+            <a:stCxn id="3" idx="3"/>
+            <a:endCxn id="4" idx="1"/>
+          </p:cNvCxnSpPr>
+          <p:nvPr/>
+        </p:nvCxnSpPr>
+        <p:spPr>
+          <a:xfrm>
+            <a:off x="0" y="0"/>
+            <a:ext cx="1" cy="1"/>
+          </a:xfrm>
+          <a:prstGeom prst="straightConnector1">
+            <a:avLst/>
+          </a:prstGeom>
+        </p:spPr>
+      </p:cxnSp>
+      <p:cxnSp>
+        <p:nvCxnSpPr>
+          <p:cNvPr id="7" name="Connector 7"/>
+          <p:cNvCxnSpPr>
+            <a:stCxn id="4" idx="3"/>
+            <a:endCxn id="5" idx="1"/>
+          </p:cNvCxnSpPr>
+          <p:nvPr/>
+        </p:nvCxnSpPr>
+        <p:spPr>
+          <a:xfrm>
+            <a:off x="0" y="0"/>
+            <a:ext cx="1" cy="1"/>
+          </a:xfrm>
+          <a:prstGeom prst="straightConnector1">
+            <a:avLst/>
+          </a:prstGeom>
+        </p:spPr>
+      </p:cxnSp>
+    </p:spTree>
+  </p:cSld>
+</p:sld>
+</file>
+
+<file path=ppt/slides/slide5.xml><?xml version="1.0" encoding="utf-8"?>
 <p:sld xmlns:p="http://schemas.openxmlformats.org/presentationml/2006/main" xmlns:a="http://schemas.openxmlformats.org/drawingml/2006/main" xmlns:r="http://schemas.openxmlformats.org/officeDocument/2006/relationships" show="0">
   <p:cSld>
     <p:spTree>
